--- a/curriculum/M01/W02/L01/slides-2.pptx
+++ b/curriculum/M01/W02/L01/slides-2.pptx
@@ -9953,11 +9953,40 @@
                 <a:ea typeface="Malgun Gothic"/>
                 <a:cs typeface="Malgun Gothic"/>
               </a:rPr>
-              <a:t>: 요소와 creatinine 축적, 고칼륨혈증, 대사성 산증(산 배설과 HCO₃⁻ 재생 모두 감소) 2. </a:t>
-            </a:r>
+              <a:t>: 요소와 creatinine 축적, 고칼륨혈증, 대사성 산증(산 배설과 HCO₃⁻ 재생 모두 감소)</a:t>
+            </a:r>
+          </a:p>
+          <a:p>
+            <a:pPr>
+              <a:spcAft>
+                <a:spcPts val="900"/>
+              </a:spcAft>
+            </a:pPr>
             <a:r>
               <a:rPr sz="1400" b="1" i="0">
                 <a:solidFill>
+                  <a:srgbClr val="F2B705"/>
+                </a:solidFill>
+                <a:latin typeface="Malgun Gothic"/>
+                <a:ea typeface="Malgun Gothic"/>
+                <a:cs typeface="Malgun Gothic"/>
+              </a:rPr>
+              <a:t>•  </a:t>
+            </a:r>
+            <a:r>
+              <a:rPr sz="1400" b="0" i="0">
+                <a:solidFill>
+                  <a:srgbClr val="11202B"/>
+                </a:solidFill>
+                <a:latin typeface="Malgun Gothic"/>
+                <a:ea typeface="Malgun Gothic"/>
+                <a:cs typeface="Malgun Gothic"/>
+              </a:rPr>
+              <a:t>2. </a:t>
+            </a:r>
+            <a:r>
+              <a:rPr sz="1400" b="1" i="0">
+                <a:solidFill>
                   <a:srgbClr val="11202B"/>
                 </a:solidFill>
                 <a:latin typeface="Malgun Gothic"/>
@@ -9975,11 +10004,40 @@
                 <a:ea typeface="Malgun Gothic"/>
                 <a:cs typeface="Malgun Gothic"/>
               </a:rPr>
-              <a:t>: Na⁺ 배설이 줄어 용적이 늘고 고혈압이 생긴다. 고혈압이 다시 신장을 손상시키는 악순환이 된다 3. </a:t>
-            </a:r>
+              <a:t>: Na⁺ 배설이 줄어 용적이 늘고 고혈압이 생긴다. 고혈압이 다시 신장을 손상시키는 악순환이 된다</a:t>
+            </a:r>
+          </a:p>
+          <a:p>
+            <a:pPr>
+              <a:spcAft>
+                <a:spcPts val="900"/>
+              </a:spcAft>
+            </a:pPr>
             <a:r>
               <a:rPr sz="1400" b="1" i="0">
                 <a:solidFill>
+                  <a:srgbClr val="F2B705"/>
+                </a:solidFill>
+                <a:latin typeface="Malgun Gothic"/>
+                <a:ea typeface="Malgun Gothic"/>
+                <a:cs typeface="Malgun Gothic"/>
+              </a:rPr>
+              <a:t>•  </a:t>
+            </a:r>
+            <a:r>
+              <a:rPr sz="1400" b="0" i="0">
+                <a:solidFill>
+                  <a:srgbClr val="11202B"/>
+                </a:solidFill>
+                <a:latin typeface="Malgun Gothic"/>
+                <a:ea typeface="Malgun Gothic"/>
+                <a:cs typeface="Malgun Gothic"/>
+              </a:rPr>
+              <a:t>3. </a:t>
+            </a:r>
+            <a:r>
+              <a:rPr sz="1400" b="1" i="0">
+                <a:solidFill>
                   <a:srgbClr val="11202B"/>
                 </a:solidFill>
                 <a:latin typeface="Malgun Gothic"/>
@@ -9997,7 +10055,36 @@
                 <a:ea typeface="Malgun Gothic"/>
                 <a:cs typeface="Malgun Gothic"/>
               </a:rPr>
-              <a:t>: erythropoietin 감소 4. </a:t>
+              <a:t>: erythropoietin 감소</a:t>
+            </a:r>
+          </a:p>
+          <a:p>
+            <a:pPr>
+              <a:spcAft>
+                <a:spcPts val="900"/>
+              </a:spcAft>
+            </a:pPr>
+            <a:r>
+              <a:rPr sz="1400" b="1" i="0">
+                <a:solidFill>
+                  <a:srgbClr val="F2B705"/>
+                </a:solidFill>
+                <a:latin typeface="Malgun Gothic"/>
+                <a:ea typeface="Malgun Gothic"/>
+                <a:cs typeface="Malgun Gothic"/>
+              </a:rPr>
+              <a:t>•  </a:t>
+            </a:r>
+            <a:r>
+              <a:rPr sz="1400" b="0" i="0">
+                <a:solidFill>
+                  <a:srgbClr val="11202B"/>
+                </a:solidFill>
+                <a:latin typeface="Malgun Gothic"/>
+                <a:ea typeface="Malgun Gothic"/>
+                <a:cs typeface="Malgun Gothic"/>
+              </a:rPr>
+              <a:t>4. </a:t>
             </a:r>
             <a:r>
               <a:rPr sz="1400" b="1" i="0">

--- a/curriculum/M01/W02/L01/slides-2.pptx
+++ b/curriculum/M01/W02/L01/slides-2.pptx
@@ -15170,7 +15170,7 @@
                 <a:ea typeface="Malgun Gothic"/>
                 <a:cs typeface="Malgun Gothic"/>
               </a:rPr>
-              <a:t>M01-W01-L01 순환계 요약 — 모세혈관 교환, Starling 힘, RAAS, 혈압 조절</a:t>
+              <a:t>M01-W01-L01 순환계 요약: 심장·혈관·혈류와 항상성 — 모세혈관 교환, Starling 힘, RAAS, 혈압 조절</a:t>
             </a:r>
           </a:p>
           <a:p>
@@ -15199,7 +15199,7 @@
                 <a:ea typeface="Malgun Gothic"/>
                 <a:cs typeface="Malgun Gothic"/>
               </a:rPr>
-              <a:t>M01-W01-L02 호흡계 요약 — Henderson–Hasselbalch 식, 산–염기 장애의 네 분류</a:t>
+              <a:t>M01-W01-L02 호흡계 요약: 환기·가스교환·산소 운반 — Henderson–Hasselbalch 식, 산–염기 장애의 네 분류</a:t>
             </a:r>
           </a:p>
           <a:p>
